--- a/examples/ppt/tables/tables-basic.pptx
+++ b/examples/ppt/tables/tables-basic.pptx
@@ -5,11 +5,11 @@
     <p:sldMasterId xmlns:r="http://schemas.openxmlformats.org/officeDocument/2006/relationships" id="2147483648" r:id="rId1"/>
   </p:sldMasterIdLst>
   <p:sldIdLst>
-    <p:sldId id="256" r:id="R9486b9dfe21745e9"/>
-    <p:sldId id="257" r:id="R254ecd524ddb4a06"/>
-    <p:sldId id="258" r:id="Rc39d37dfe9dd44b4"/>
-    <p:sldId id="259" r:id="R5d3018eb619f4639"/>
-    <p:sldId id="260" r:id="R6b3ca158bb5b4a0d"/>
+    <p:sldId id="256" r:id="Rfef9a5ce9b5d4755"/>
+    <p:sldId id="257" r:id="R9890a800a1034980"/>
+    <p:sldId id="258" r:id="Rf9af49069a354df7"/>
+    <p:sldId id="259" r:id="Radfbc458a90448d2"/>
+    <p:sldId id="260" r:id="Ra407c11180f5497d"/>
   </p:sldIdLst>
   <p:sldSz cx="12192000" cy="6858000"/>
   <p:notesSz cx="6858000" cy="9144000"/>
@@ -284,7 +284,7 @@
 </file>
 
 <file path=ppt/slideMasters/slideMaster1.xml><?xml version="1.0" encoding="utf-8"?>
-<p:sldMaster xmlns:p="http://schemas.openxmlformats.org/presentationml/2006/main">
+<p:sldMaster xmlns:r="http://schemas.openxmlformats.org/officeDocument/2006/relationships" xmlns:p="http://schemas.openxmlformats.org/presentationml/2006/main">
   <p:cSld>
     <p:spTree>
       <p:nvGrpSpPr>
@@ -2686,7 +2686,7 @@
                       <a:prstDash val="solid"/>
                     </a:lnB>
                     <a:blipFill>
-                      <a:blip xmlns:r="http://schemas.openxmlformats.org/officeDocument/2006/relationships" r:embed="Rad02716030684106"/>
+                      <a:blip xmlns:r="http://schemas.openxmlformats.org/officeDocument/2006/relationships" r:embed="R6b350965965d485b"/>
                       <a:stretch>
                         <a:fillRect/>
                       </a:stretch>
